--- a/matrixcalculator/public/pdf/matrixcalculator.pptx
+++ b/matrixcalculator/public/pdf/matrixcalculator.pptx
@@ -238,7 +238,7 @@
               <a:pPr lvl="0">
                 <a:defRPr/>
               </a:pPr>
-              <a:t>2026-03-06</a:t>
+              <a:t>2026-04-01</a:t>
             </a:fld>
             <a:endParaRPr lang="ko-KR" altLang="en-US"/>
           </a:p>
@@ -421,7 +421,7 @@
               <a:pPr lvl="0">
                 <a:defRPr/>
               </a:pPr>
-              <a:t>2026-03-06</a:t>
+              <a:t>2026-04-01</a:t>
             </a:fld>
             <a:endParaRPr lang="ko-KR" altLang="en-US"/>
           </a:p>
@@ -1830,7 +1830,7 @@
               <a:pPr>
                 <a:defRPr lang="ko-KR" altLang="en-US"/>
               </a:pPr>
-              <a:t>2026-03-06</a:t>
+              <a:t>2026-04-01</a:t>
             </a:fld>
             <a:endParaRPr lang="ko-KR" altLang="en-US"/>
           </a:p>
@@ -2520,7 +2520,7 @@
               <a:pPr>
                 <a:defRPr lang="ko-KR" altLang="en-US"/>
               </a:pPr>
-              <a:t>2026-03-06</a:t>
+              <a:t>2026-04-01</a:t>
             </a:fld>
             <a:endParaRPr lang="ko-KR" altLang="en-US"/>
           </a:p>
@@ -3401,7 +3401,7 @@
               <a:pPr>
                 <a:defRPr lang="ko-KR" altLang="en-US"/>
               </a:pPr>
-              <a:t>2026-03-06</a:t>
+              <a:t>2026-04-01</a:t>
             </a:fld>
             <a:endParaRPr lang="ko-KR" altLang="en-US"/>
           </a:p>
@@ -4394,7 +4394,7 @@
               <a:pPr>
                 <a:defRPr lang="ko-KR" altLang="en-US"/>
               </a:pPr>
-              <a:t>2026-03-06</a:t>
+              <a:t>2026-04-01</a:t>
             </a:fld>
             <a:endParaRPr lang="ko-KR" altLang="en-US"/>
           </a:p>
@@ -4586,7 +4586,7 @@
               <a:pPr lvl="0">
                 <a:defRPr/>
               </a:pPr>
-              <a:t>2026-03-06</a:t>
+              <a:t>2026-04-01</a:t>
             </a:fld>
             <a:endParaRPr lang="ko-KR" altLang="en-US"/>
           </a:p>
@@ -4778,7 +4778,7 @@
               <a:pPr>
                 <a:defRPr lang="ko-KR" altLang="en-US"/>
               </a:pPr>
-              <a:t>2026-03-06</a:t>
+              <a:t>2026-04-01</a:t>
             </a:fld>
             <a:endParaRPr lang="ko-KR" altLang="en-US"/>
           </a:p>
@@ -4884,7 +4884,7 @@
               <a:pPr>
                 <a:defRPr lang="ko-KR" altLang="en-US"/>
               </a:pPr>
-              <a:t>2026-03-06</a:t>
+              <a:t>2026-04-01</a:t>
             </a:fld>
             <a:endParaRPr lang="ko-KR" altLang="en-US"/>
           </a:p>
@@ -5703,7 +5703,7 @@
               <a:pPr>
                 <a:defRPr lang="ko-KR" altLang="en-US"/>
               </a:pPr>
-              <a:t>2026-03-06</a:t>
+              <a:t>2026-04-01</a:t>
             </a:fld>
             <a:endParaRPr lang="ko-KR" altLang="en-US"/>
           </a:p>
@@ -6022,7 +6022,7 @@
               <a:pPr>
                 <a:defRPr lang="ko-KR" altLang="en-US"/>
               </a:pPr>
-              <a:t>2026-03-06</a:t>
+              <a:t>2026-04-01</a:t>
             </a:fld>
             <a:endParaRPr lang="ko-KR" altLang="en-US"/>
           </a:p>
@@ -6128,7 +6128,7 @@
               <a:pPr>
                 <a:defRPr lang="ko-KR" altLang="en-US"/>
               </a:pPr>
-              <a:t>2026-03-06</a:t>
+              <a:t>2026-04-01</a:t>
             </a:fld>
             <a:endParaRPr lang="ko-KR" altLang="en-US"/>
           </a:p>
@@ -6349,7 +6349,7 @@
               <a:pPr>
                 <a:defRPr lang="ko-KR" altLang="en-US"/>
               </a:pPr>
-              <a:t>2026-03-06</a:t>
+              <a:t>2026-04-01</a:t>
             </a:fld>
             <a:endParaRPr lang="ko-KR" altLang="en-US"/>
           </a:p>
@@ -6910,7 +6910,7 @@
               <a:pPr>
                 <a:defRPr lang="ko-KR" altLang="en-US"/>
               </a:pPr>
-              <a:t>2026-03-06</a:t>
+              <a:t>2026-04-01</a:t>
             </a:fld>
             <a:endParaRPr lang="ko-KR" altLang="en-US"/>
           </a:p>
@@ -7947,7 +7947,7 @@
               <a:pPr>
                 <a:defRPr lang="ko-KR" altLang="en-US"/>
               </a:pPr>
-              <a:t>2026-03-06</a:t>
+              <a:t>2026-04-01</a:t>
             </a:fld>
             <a:endParaRPr lang="ko-KR" altLang="en-US"/>
           </a:p>
@@ -8931,7 +8931,7 @@
               <a:pPr>
                 <a:defRPr lang="ko-KR" altLang="en-US"/>
               </a:pPr>
-              <a:t>2026-03-06</a:t>
+              <a:t>2026-04-01</a:t>
             </a:fld>
             <a:endParaRPr lang="ko-KR" altLang="en-US"/>
           </a:p>
@@ -9503,7 +9503,7 @@
     <mc:Choice Requires="p14">
       <p:transition/>
     </mc:Choice>
-    <mc:Fallback xmlns:dsp="http://schemas.microsoft.com/office/drawing/2008/diagram" xmlns:dgm="http://schemas.openxmlformats.org/drawingml/2006/diagram" xmlns:c="http://schemas.openxmlformats.org/drawingml/2006/chart" xmlns="">
+    <mc:Fallback xmlns="" xmlns:c="http://schemas.openxmlformats.org/drawingml/2006/chart" xmlns:dgm="http://schemas.openxmlformats.org/drawingml/2006/diagram" xmlns:dsp="http://schemas.microsoft.com/office/drawing/2008/diagram">
       <p:transition/>
     </mc:Fallback>
   </mc:AlternateContent>
@@ -9815,7 +9815,7 @@
     <mc:Choice Requires="p14">
       <p:transition/>
     </mc:Choice>
-    <mc:Fallback xmlns:dsp="http://schemas.microsoft.com/office/drawing/2008/diagram" xmlns:dgm="http://schemas.openxmlformats.org/drawingml/2006/diagram" xmlns:c="http://schemas.openxmlformats.org/drawingml/2006/chart" xmlns="">
+    <mc:Fallback xmlns="" xmlns:c="http://schemas.openxmlformats.org/drawingml/2006/chart" xmlns:dgm="http://schemas.openxmlformats.org/drawingml/2006/diagram" xmlns:dsp="http://schemas.microsoft.com/office/drawing/2008/diagram">
       <p:transition/>
     </mc:Fallback>
   </mc:AlternateContent>
@@ -10136,7 +10136,7 @@
     <mc:Choice Requires="p14">
       <p:transition/>
     </mc:Choice>
-    <mc:Fallback xmlns:dsp="http://schemas.microsoft.com/office/drawing/2008/diagram" xmlns:dgm="http://schemas.openxmlformats.org/drawingml/2006/diagram" xmlns:c="http://schemas.openxmlformats.org/drawingml/2006/chart" xmlns="">
+    <mc:Fallback xmlns="" xmlns:c="http://schemas.openxmlformats.org/drawingml/2006/chart" xmlns:dgm="http://schemas.openxmlformats.org/drawingml/2006/diagram" xmlns:dsp="http://schemas.microsoft.com/office/drawing/2008/diagram">
       <p:transition/>
     </mc:Fallback>
   </mc:AlternateContent>
@@ -10457,7 +10457,7 @@
     <mc:Choice Requires="p14">
       <p:transition/>
     </mc:Choice>
-    <mc:Fallback xmlns:dsp="http://schemas.microsoft.com/office/drawing/2008/diagram" xmlns:dgm="http://schemas.openxmlformats.org/drawingml/2006/diagram" xmlns:c="http://schemas.openxmlformats.org/drawingml/2006/chart" xmlns="">
+    <mc:Fallback xmlns="" xmlns:c="http://schemas.openxmlformats.org/drawingml/2006/chart" xmlns:dgm="http://schemas.openxmlformats.org/drawingml/2006/diagram" xmlns:dsp="http://schemas.microsoft.com/office/drawing/2008/diagram">
       <p:transition/>
     </mc:Fallback>
   </mc:AlternateContent>
@@ -10810,7 +10810,7 @@
     <mc:Choice Requires="p14">
       <p:transition/>
     </mc:Choice>
-    <mc:Fallback xmlns:dsp="http://schemas.microsoft.com/office/drawing/2008/diagram" xmlns:dgm="http://schemas.openxmlformats.org/drawingml/2006/diagram" xmlns:c="http://schemas.openxmlformats.org/drawingml/2006/chart" xmlns="">
+    <mc:Fallback xmlns="" xmlns:c="http://schemas.openxmlformats.org/drawingml/2006/chart" xmlns:dgm="http://schemas.openxmlformats.org/drawingml/2006/diagram" xmlns:dsp="http://schemas.microsoft.com/office/drawing/2008/diagram">
       <p:transition/>
     </mc:Fallback>
   </mc:AlternateContent>
@@ -11177,7 +11177,7 @@
     <mc:Choice Requires="p14">
       <p:transition/>
     </mc:Choice>
-    <mc:Fallback xmlns:dsp="http://schemas.microsoft.com/office/drawing/2008/diagram" xmlns:dgm="http://schemas.openxmlformats.org/drawingml/2006/diagram" xmlns:c="http://schemas.openxmlformats.org/drawingml/2006/chart" xmlns="">
+    <mc:Fallback xmlns="" xmlns:c="http://schemas.openxmlformats.org/drawingml/2006/chart" xmlns:dgm="http://schemas.openxmlformats.org/drawingml/2006/diagram" xmlns:dsp="http://schemas.microsoft.com/office/drawing/2008/diagram">
       <p:transition/>
     </mc:Fallback>
   </mc:AlternateContent>
@@ -11508,7 +11508,7 @@
     <mc:Choice Requires="p14">
       <p:transition/>
     </mc:Choice>
-    <mc:Fallback xmlns:dsp="http://schemas.microsoft.com/office/drawing/2008/diagram" xmlns:dgm="http://schemas.openxmlformats.org/drawingml/2006/diagram" xmlns:c="http://schemas.openxmlformats.org/drawingml/2006/chart" xmlns="">
+    <mc:Fallback xmlns="" xmlns:c="http://schemas.openxmlformats.org/drawingml/2006/chart" xmlns:dgm="http://schemas.openxmlformats.org/drawingml/2006/diagram" xmlns:dsp="http://schemas.microsoft.com/office/drawing/2008/diagram">
       <p:transition/>
     </mc:Fallback>
   </mc:AlternateContent>
@@ -11813,7 +11813,7 @@
     <mc:Choice Requires="p14">
       <p:transition/>
     </mc:Choice>
-    <mc:Fallback xmlns:dsp="http://schemas.microsoft.com/office/drawing/2008/diagram" xmlns:dgm="http://schemas.openxmlformats.org/drawingml/2006/diagram" xmlns:c="http://schemas.openxmlformats.org/drawingml/2006/chart" xmlns="">
+    <mc:Fallback xmlns="" xmlns:c="http://schemas.openxmlformats.org/drawingml/2006/chart" xmlns:dgm="http://schemas.openxmlformats.org/drawingml/2006/diagram" xmlns:dsp="http://schemas.microsoft.com/office/drawing/2008/diagram">
       <p:transition/>
     </mc:Fallback>
   </mc:AlternateContent>
@@ -12128,7 +12128,7 @@
     <mc:Choice Requires="p14">
       <p:transition/>
     </mc:Choice>
-    <mc:Fallback xmlns:dsp="http://schemas.microsoft.com/office/drawing/2008/diagram" xmlns:dgm="http://schemas.openxmlformats.org/drawingml/2006/diagram" xmlns:c="http://schemas.openxmlformats.org/drawingml/2006/chart" xmlns="">
+    <mc:Fallback xmlns="" xmlns:c="http://schemas.openxmlformats.org/drawingml/2006/chart" xmlns:dgm="http://schemas.openxmlformats.org/drawingml/2006/diagram" xmlns:dsp="http://schemas.microsoft.com/office/drawing/2008/diagram">
       <p:transition/>
     </mc:Fallback>
   </mc:AlternateContent>
@@ -12407,7 +12407,7 @@
     <mc:Choice Requires="p14">
       <p:transition/>
     </mc:Choice>
-    <mc:Fallback xmlns:dsp="http://schemas.microsoft.com/office/drawing/2008/diagram" xmlns:dgm="http://schemas.openxmlformats.org/drawingml/2006/diagram" xmlns:c="http://schemas.openxmlformats.org/drawingml/2006/chart" xmlns="">
+    <mc:Fallback xmlns="" xmlns:c="http://schemas.openxmlformats.org/drawingml/2006/chart" xmlns:dgm="http://schemas.openxmlformats.org/drawingml/2006/diagram" xmlns:dsp="http://schemas.microsoft.com/office/drawing/2008/diagram">
       <p:transition/>
     </mc:Fallback>
   </mc:AlternateContent>
@@ -12703,7 +12703,7 @@
     <mc:Choice Requires="p14">
       <p:transition/>
     </mc:Choice>
-    <mc:Fallback xmlns:dsp="http://schemas.microsoft.com/office/drawing/2008/diagram" xmlns:dgm="http://schemas.openxmlformats.org/drawingml/2006/diagram" xmlns:c="http://schemas.openxmlformats.org/drawingml/2006/chart" xmlns="">
+    <mc:Fallback xmlns="" xmlns:c="http://schemas.openxmlformats.org/drawingml/2006/chart" xmlns:dgm="http://schemas.openxmlformats.org/drawingml/2006/diagram" xmlns:dsp="http://schemas.microsoft.com/office/drawing/2008/diagram">
       <p:transition/>
     </mc:Fallback>
   </mc:AlternateContent>
@@ -12960,7 +12960,7 @@
     <mc:Choice Requires="p14">
       <p:transition/>
     </mc:Choice>
-    <mc:Fallback xmlns:dsp="http://schemas.microsoft.com/office/drawing/2008/diagram" xmlns:dgm="http://schemas.openxmlformats.org/drawingml/2006/diagram" xmlns:c="http://schemas.openxmlformats.org/drawingml/2006/chart" xmlns="">
+    <mc:Fallback xmlns="" xmlns:c="http://schemas.openxmlformats.org/drawingml/2006/chart" xmlns:dgm="http://schemas.openxmlformats.org/drawingml/2006/diagram" xmlns:dsp="http://schemas.microsoft.com/office/drawing/2008/diagram">
       <p:transition/>
     </mc:Fallback>
   </mc:AlternateContent>
@@ -13138,7 +13138,7 @@
     <mc:Choice Requires="p14">
       <p:transition/>
     </mc:Choice>
-    <mc:Fallback xmlns:dsp="http://schemas.microsoft.com/office/drawing/2008/diagram" xmlns:dgm="http://schemas.openxmlformats.org/drawingml/2006/diagram" xmlns:c="http://schemas.openxmlformats.org/drawingml/2006/chart" xmlns="">
+    <mc:Fallback xmlns="" xmlns:c="http://schemas.openxmlformats.org/drawingml/2006/chart" xmlns:dgm="http://schemas.openxmlformats.org/drawingml/2006/diagram" xmlns:dsp="http://schemas.microsoft.com/office/drawing/2008/diagram">
       <p:transition/>
     </mc:Fallback>
   </mc:AlternateContent>
@@ -13162,6 +13162,36 @@
           <a:chExt cx="0" cy="0"/>
         </a:xfrm>
       </p:grpSpPr>
+      <p:pic>
+        <p:nvPicPr>
+          <p:cNvPr id="10" name="그림 9">
+            <a:extLst>
+              <a:ext uri="{FF2B5EF4-FFF2-40B4-BE49-F238E27FC236}">
+                <a16:creationId xmlns:a16="http://schemas.microsoft.com/office/drawing/2014/main" id="{F4F5D8DB-85A5-4079-8760-38F730B6F8AD}"/>
+              </a:ext>
+            </a:extLst>
+          </p:cNvPr>
+          <p:cNvPicPr>
+            <a:picLocks noChangeAspect="1"/>
+          </p:cNvPicPr>
+          <p:nvPr/>
+        </p:nvPicPr>
+        <p:blipFill>
+          <a:blip r:embed="rId2"/>
+          <a:stretch>
+            <a:fillRect/>
+          </a:stretch>
+        </p:blipFill>
+        <p:spPr>
+          <a:xfrm>
+            <a:off x="419098" y="1294912"/>
+            <a:ext cx="11049001" cy="5213606"/>
+          </a:xfrm>
+          <a:prstGeom prst="rect">
+            <a:avLst/>
+          </a:prstGeom>
+        </p:spPr>
+      </p:pic>
       <p:sp>
         <p:nvSpPr>
           <p:cNvPr id="2" name="제목 1"/>
@@ -13190,7 +13220,7 @@
               <a:defRPr/>
             </a:pPr>
             <a:r>
-              <a:rPr lang="ko-KR" altLang="en-US" sz="6000">
+              <a:rPr lang="ko-KR" altLang="en-US" sz="6000" dirty="0">
                 <a:effectLst/>
                 <a:latin typeface="휴먼편지체"/>
                 <a:ea typeface="휴먼편지체"/>
@@ -13198,87 +13228,87 @@
               <a:t>행렬 계산기 소개</a:t>
             </a:r>
             <a:br>
+              <a:rPr lang="ko-KR" altLang="en-US" sz="4000" dirty="0">
+                <a:effectLst/>
+                <a:latin typeface="휴먼편지체"/>
+                <a:ea typeface="휴먼편지체"/>
+              </a:rPr>
+            </a:br>
+            <a:endParaRPr lang="ko-KR" altLang="en-US" sz="3000" dirty="0">
+              <a:effectLst/>
+              <a:latin typeface="휴먼편지체"/>
+              <a:ea typeface="휴먼편지체"/>
+            </a:endParaRPr>
+          </a:p>
+        </p:txBody>
+      </p:sp>
+      <p:sp>
+        <p:nvSpPr>
+          <p:cNvPr id="5" name="TextBox 4"/>
+          <p:cNvSpPr txBox="1"/>
+          <p:nvPr/>
+        </p:nvSpPr>
+        <p:spPr>
+          <a:xfrm>
+            <a:off x="11694555" y="6323852"/>
+            <a:ext cx="296876" cy="369332"/>
+          </a:xfrm>
+          <a:prstGeom prst="rect">
+            <a:avLst/>
+          </a:prstGeom>
+        </p:spPr>
+        <p:txBody>
+          <a:bodyPr wrap="none">
+            <a:spAutoFit/>
+          </a:bodyPr>
+          <a:lstStyle/>
+          <a:p>
+            <a:pPr>
+              <a:defRPr/>
+            </a:pPr>
+            <a:r>
+              <a:rPr lang="en-US" altLang="ko-KR">
+                <a:latin typeface="휴먼편지체"/>
+                <a:ea typeface="휴먼편지체"/>
+              </a:rPr>
+              <a:t>3</a:t>
+            </a:r>
+          </a:p>
+        </p:txBody>
+      </p:sp>
+      <p:sp>
+        <p:nvSpPr>
+          <p:cNvPr id="6" name="TextBox 5"/>
+          <p:cNvSpPr txBox="1"/>
+          <p:nvPr/>
+        </p:nvSpPr>
+        <p:spPr>
+          <a:xfrm>
+            <a:off x="403224" y="1114282"/>
+            <a:ext cx="2755266" cy="693563"/>
+          </a:xfrm>
+          <a:prstGeom prst="rect">
+            <a:avLst/>
+          </a:prstGeom>
+        </p:spPr>
+        <p:txBody>
+          <a:bodyPr wrap="none">
+            <a:spAutoFit/>
+          </a:bodyPr>
+          <a:lstStyle/>
+          <a:p>
+            <a:pPr marL="740000" indent="-740000">
+              <a:buBlip>
+                <a:blip r:embed="rId3"/>
+              </a:buBlip>
+              <a:defRPr/>
+            </a:pPr>
+            <a:r>
               <a:rPr lang="ko-KR" altLang="en-US" sz="4000">
                 <a:effectLst/>
                 <a:latin typeface="휴먼편지체"/>
                 <a:ea typeface="휴먼편지체"/>
               </a:rPr>
-            </a:br>
-            <a:endParaRPr lang="ko-KR" altLang="en-US" sz="3000">
-              <a:effectLst/>
-              <a:latin typeface="휴먼편지체"/>
-              <a:ea typeface="휴먼편지체"/>
-            </a:endParaRPr>
-          </a:p>
-        </p:txBody>
-      </p:sp>
-      <p:sp>
-        <p:nvSpPr>
-          <p:cNvPr id="5" name="TextBox 4"/>
-          <p:cNvSpPr txBox="1"/>
-          <p:nvPr/>
-        </p:nvSpPr>
-        <p:spPr>
-          <a:xfrm>
-            <a:off x="11694555" y="6323852"/>
-            <a:ext cx="296876" cy="369332"/>
-          </a:xfrm>
-          <a:prstGeom prst="rect">
-            <a:avLst/>
-          </a:prstGeom>
-        </p:spPr>
-        <p:txBody>
-          <a:bodyPr wrap="none">
-            <a:spAutoFit/>
-          </a:bodyPr>
-          <a:lstStyle/>
-          <a:p>
-            <a:pPr>
-              <a:defRPr/>
-            </a:pPr>
-            <a:r>
-              <a:rPr lang="en-US" altLang="ko-KR">
-                <a:latin typeface="휴먼편지체"/>
-                <a:ea typeface="휴먼편지체"/>
-              </a:rPr>
-              <a:t>3</a:t>
-            </a:r>
-          </a:p>
-        </p:txBody>
-      </p:sp>
-      <p:sp>
-        <p:nvSpPr>
-          <p:cNvPr id="6" name="TextBox 5"/>
-          <p:cNvSpPr txBox="1"/>
-          <p:nvPr/>
-        </p:nvSpPr>
-        <p:spPr>
-          <a:xfrm>
-            <a:off x="403224" y="1114282"/>
-            <a:ext cx="2755266" cy="693563"/>
-          </a:xfrm>
-          <a:prstGeom prst="rect">
-            <a:avLst/>
-          </a:prstGeom>
-        </p:spPr>
-        <p:txBody>
-          <a:bodyPr wrap="none">
-            <a:spAutoFit/>
-          </a:bodyPr>
-          <a:lstStyle/>
-          <a:p>
-            <a:pPr marL="740000" indent="-740000">
-              <a:buBlip>
-                <a:blip r:embed="rId2"/>
-              </a:buBlip>
-              <a:defRPr/>
-            </a:pPr>
-            <a:r>
-              <a:rPr lang="ko-KR" altLang="en-US" sz="4000">
-                <a:effectLst/>
-                <a:latin typeface="휴먼편지체"/>
-                <a:ea typeface="휴먼편지체"/>
-              </a:rPr>
               <a:t>전체화면</a:t>
             </a:r>
             <a:endParaRPr lang="ko-KR" altLang="en-US" sz="4000">
@@ -13291,7 +13321,7 @@
       <p:pic>
         <p:nvPicPr>
           <p:cNvPr id="7" name="그림 6">
-            <a:hlinkClick r:id="rId3"/>
+            <a:hlinkClick r:id="rId4"/>
             <a:extLst>
               <a:ext uri="{FF2B5EF4-FFF2-40B4-BE49-F238E27FC236}">
                 <a16:creationId xmlns:a16="http://schemas.microsoft.com/office/drawing/2014/main" id="{C77DF213-EF19-4BD5-9D00-72283497818D}"/>
@@ -13304,7 +13334,7 @@
           <p:nvPr/>
         </p:nvPicPr>
         <p:blipFill rotWithShape="1">
-          <a:blip r:embed="rId4"/>
+          <a:blip r:embed="rId5"/>
           <a:stretch>
             <a:fillRect/>
           </a:stretch>
@@ -13317,41 +13347,6 @@
           <a:prstGeom prst="rect">
             <a:avLst/>
           </a:prstGeom>
-        </p:spPr>
-      </p:pic>
-      <p:pic>
-        <p:nvPicPr>
-          <p:cNvPr id="9" name="내용 개체 틀 8">
-            <a:extLst>
-              <a:ext uri="{FF2B5EF4-FFF2-40B4-BE49-F238E27FC236}">
-                <a16:creationId xmlns:a16="http://schemas.microsoft.com/office/drawing/2014/main" id="{5E9F6A9A-097D-44BE-B775-97CF06E9943A}"/>
-              </a:ext>
-            </a:extLst>
-          </p:cNvPr>
-          <p:cNvPicPr>
-            <a:picLocks noGrp="1" noChangeAspect="1"/>
-          </p:cNvPicPr>
-          <p:nvPr>
-            <p:ph idx="1"/>
-          </p:nvPr>
-        </p:nvPicPr>
-        <p:blipFill>
-          <a:blip r:embed="rId5">
-            <a:extLst>
-              <a:ext uri="{28A0092B-C50C-407E-A947-70E740481C1C}">
-                <a14:useLocalDpi xmlns:a14="http://schemas.microsoft.com/office/drawing/2010/main" val="0"/>
-              </a:ext>
-            </a:extLst>
-          </a:blip>
-          <a:stretch>
-            <a:fillRect/>
-          </a:stretch>
-        </p:blipFill>
-        <p:spPr>
-          <a:xfrm>
-            <a:off x="200569" y="1732246"/>
-            <a:ext cx="11109772" cy="4960938"/>
-          </a:xfrm>
         </p:spPr>
       </p:pic>
     </p:spTree>
@@ -13363,7 +13358,7 @@
     <mc:Choice Requires="p14">
       <p:transition/>
     </mc:Choice>
-    <mc:Fallback xmlns:dsp="http://schemas.microsoft.com/office/drawing/2008/diagram" xmlns:dgm="http://schemas.openxmlformats.org/drawingml/2006/diagram" xmlns:c="http://schemas.openxmlformats.org/drawingml/2006/chart" xmlns="">
+    <mc:Fallback xmlns="" xmlns:c="http://schemas.openxmlformats.org/drawingml/2006/chart" xmlns:dgm="http://schemas.openxmlformats.org/drawingml/2006/diagram" xmlns:dsp="http://schemas.microsoft.com/office/drawing/2008/diagram">
       <p:transition/>
     </mc:Fallback>
   </mc:AlternateContent>
@@ -13389,37 +13384,32 @@
       </p:grpSpPr>
       <p:pic>
         <p:nvPicPr>
-          <p:cNvPr id="6" name="내용 개체 틀 5">
+          <p:cNvPr id="8" name="그림 7">
             <a:extLst>
               <a:ext uri="{FF2B5EF4-FFF2-40B4-BE49-F238E27FC236}">
-                <a16:creationId xmlns:a16="http://schemas.microsoft.com/office/drawing/2014/main" id="{F7D74148-55E7-4204-8734-42DC0973D944}"/>
+                <a16:creationId xmlns:a16="http://schemas.microsoft.com/office/drawing/2014/main" id="{9C7ED7A9-D400-4214-A3CD-0FA7C99B522D}"/>
               </a:ext>
             </a:extLst>
           </p:cNvPr>
           <p:cNvPicPr>
-            <a:picLocks noGrp="1" noChangeAspect="1"/>
+            <a:picLocks noChangeAspect="1"/>
           </p:cNvPicPr>
-          <p:nvPr>
-            <p:ph idx="1"/>
-          </p:nvPr>
+          <p:nvPr/>
         </p:nvPicPr>
         <p:blipFill>
-          <a:blip r:embed="rId2">
-            <a:extLst>
-              <a:ext uri="{28A0092B-C50C-407E-A947-70E740481C1C}">
-                <a14:useLocalDpi xmlns:a14="http://schemas.microsoft.com/office/drawing/2010/main" val="0"/>
-              </a:ext>
-            </a:extLst>
-          </a:blip>
+          <a:blip r:embed="rId2"/>
           <a:stretch>
             <a:fillRect/>
           </a:stretch>
         </p:blipFill>
         <p:spPr>
           <a:xfrm>
-            <a:off x="285750" y="1767921"/>
-            <a:ext cx="11303000" cy="2676040"/>
-          </a:xfrm>
+            <a:off x="285751" y="1214727"/>
+            <a:ext cx="11340135" cy="3025206"/>
+          </a:xfrm>
+          <a:prstGeom prst="rect">
+            <a:avLst/>
+          </a:prstGeom>
         </p:spPr>
       </p:pic>
       <p:sp>
@@ -13469,7 +13459,7 @@
         </p:nvSpPr>
         <p:spPr>
           <a:xfrm>
-            <a:off x="519495" y="4928414"/>
+            <a:off x="285751" y="4928414"/>
             <a:ext cx="2872228" cy="584775"/>
           </a:xfrm>
           <a:prstGeom prst="rect">
@@ -13486,14 +13476,14 @@
               <a:defRPr/>
             </a:pPr>
             <a:r>
-              <a:rPr lang="en-US" altLang="ko-KR" sz="1600">
+              <a:rPr lang="en-US" altLang="ko-KR" sz="1600" dirty="0">
                 <a:latin typeface="휴먼엑스포"/>
                 <a:ea typeface="휴먼엑스포"/>
               </a:rPr>
               <a:t>1.</a:t>
             </a:r>
             <a:r>
-              <a:rPr lang="ko-KR" altLang="en-US" sz="1600">
+              <a:rPr lang="ko-KR" altLang="en-US" sz="1600" dirty="0">
                 <a:latin typeface="휴먼엑스포"/>
                 <a:ea typeface="휴먼엑스포"/>
               </a:rPr>
@@ -13505,28 +13495,28 @@
               <a:defRPr/>
             </a:pPr>
             <a:r>
-              <a:rPr lang="ko-KR" altLang="en-US" sz="1600">
+              <a:rPr lang="ko-KR" altLang="en-US" sz="1600" dirty="0">
                 <a:latin typeface="휴먼엑스포"/>
                 <a:ea typeface="휴먼엑스포"/>
               </a:rPr>
               <a:t>   </a:t>
             </a:r>
             <a:r>
-              <a:rPr lang="en-US" altLang="ko-KR" sz="1600">
+              <a:rPr lang="en-US" altLang="ko-KR" sz="1600" dirty="0">
                 <a:latin typeface="휴먼엑스포"/>
                 <a:ea typeface="휴먼엑스포"/>
               </a:rPr>
               <a:t>1~9</a:t>
             </a:r>
             <a:r>
-              <a:rPr lang="ko-KR" altLang="en-US" sz="1600">
+              <a:rPr lang="ko-KR" altLang="en-US" sz="1600" dirty="0">
                 <a:latin typeface="휴먼엑스포"/>
                 <a:ea typeface="휴먼엑스포"/>
               </a:rPr>
               <a:t>의 숫자 중 입력합니다</a:t>
             </a:r>
             <a:r>
-              <a:rPr lang="en-US" altLang="ko-KR" sz="1600">
+              <a:rPr lang="en-US" altLang="ko-KR" sz="1600" dirty="0">
                 <a:latin typeface="휴먼엑스포"/>
                 <a:ea typeface="휴먼엑스포"/>
               </a:rPr>
@@ -13543,7 +13533,7 @@
         </p:nvSpPr>
         <p:spPr>
           <a:xfrm>
-            <a:off x="4388013" y="4928414"/>
+            <a:off x="4548272" y="4917103"/>
             <a:ext cx="2872227" cy="584775"/>
           </a:xfrm>
           <a:prstGeom prst="rect">
@@ -13560,14 +13550,14 @@
               <a:defRPr/>
             </a:pPr>
             <a:r>
-              <a:rPr lang="en-US" altLang="ko-KR" sz="1600">
+              <a:rPr lang="en-US" altLang="ko-KR" sz="1600" dirty="0">
                 <a:latin typeface="휴먼엑스포"/>
                 <a:ea typeface="휴먼엑스포"/>
               </a:rPr>
               <a:t>2.</a:t>
             </a:r>
             <a:r>
-              <a:rPr lang="ko-KR" altLang="en-US" sz="1600">
+              <a:rPr lang="ko-KR" altLang="en-US" sz="1600" dirty="0">
                 <a:latin typeface="휴먼엑스포"/>
                 <a:ea typeface="휴먼엑스포"/>
               </a:rPr>
@@ -13579,28 +13569,28 @@
               <a:defRPr/>
             </a:pPr>
             <a:r>
-              <a:rPr lang="ko-KR" altLang="en-US" sz="1600">
+              <a:rPr lang="ko-KR" altLang="en-US" sz="1600" dirty="0">
                 <a:latin typeface="휴먼엑스포"/>
                 <a:ea typeface="휴먼엑스포"/>
               </a:rPr>
               <a:t>   </a:t>
             </a:r>
             <a:r>
-              <a:rPr lang="en-US" altLang="ko-KR" sz="1600">
+              <a:rPr lang="en-US" altLang="ko-KR" sz="1600" dirty="0">
                 <a:latin typeface="휴먼엑스포"/>
                 <a:ea typeface="휴먼엑스포"/>
               </a:rPr>
               <a:t>1~9</a:t>
             </a:r>
             <a:r>
-              <a:rPr lang="ko-KR" altLang="en-US" sz="1600">
+              <a:rPr lang="ko-KR" altLang="en-US" sz="1600" dirty="0">
                 <a:latin typeface="휴먼엑스포"/>
                 <a:ea typeface="휴먼엑스포"/>
               </a:rPr>
               <a:t>의 숫자 중 입력합니다</a:t>
             </a:r>
             <a:r>
-              <a:rPr lang="en-US" altLang="ko-KR" sz="1600">
+              <a:rPr lang="en-US" altLang="ko-KR" sz="1600" dirty="0">
                 <a:latin typeface="휴먼엑스포"/>
                 <a:ea typeface="휴먼엑스포"/>
               </a:rPr>
@@ -13617,7 +13607,7 @@
         </p:nvSpPr>
         <p:spPr>
           <a:xfrm>
-            <a:off x="7420499" y="4881279"/>
+            <a:off x="7635278" y="4760981"/>
             <a:ext cx="4658588" cy="2108269"/>
           </a:xfrm>
           <a:prstGeom prst="rect">
@@ -13634,56 +13624,56 @@
               <a:defRPr/>
             </a:pPr>
             <a:r>
-              <a:rPr lang="en-US" altLang="ko-KR" sz="1400">
+              <a:rPr lang="en-US" altLang="ko-KR" sz="1400" dirty="0">
                 <a:latin typeface="휴먼엑스포"/>
                 <a:ea typeface="휴먼엑스포"/>
               </a:rPr>
               <a:t>3.</a:t>
             </a:r>
             <a:r>
-              <a:rPr lang="ko-KR" altLang="en-US" sz="1400">
+              <a:rPr lang="ko-KR" altLang="en-US" sz="1400" dirty="0">
                 <a:latin typeface="휴먼엑스포"/>
                 <a:ea typeface="휴먼엑스포"/>
               </a:rPr>
               <a:t> 자동완성</a:t>
             </a:r>
             <a:r>
-              <a:rPr lang="en-US" altLang="ko-KR" sz="1400">
+              <a:rPr lang="en-US" altLang="ko-KR" sz="1400" dirty="0">
                 <a:latin typeface="휴먼엑스포"/>
                 <a:ea typeface="휴먼엑스포"/>
               </a:rPr>
               <a:t>:</a:t>
             </a:r>
             <a:r>
-              <a:rPr lang="ko-KR" altLang="en-US" sz="1400">
+              <a:rPr lang="ko-KR" altLang="en-US" sz="1400" dirty="0">
                 <a:latin typeface="휴먼엑스포"/>
                 <a:ea typeface="휴먼엑스포"/>
               </a:rPr>
               <a:t> </a:t>
             </a:r>
             <a:r>
-              <a:rPr lang="en-US" altLang="ko-KR" sz="1400">
+              <a:rPr lang="en-US" altLang="ko-KR" sz="1400" dirty="0">
                 <a:latin typeface="휴먼엑스포"/>
                 <a:ea typeface="휴먼엑스포"/>
               </a:rPr>
               <a:t>1,2</a:t>
             </a:r>
             <a:r>
-              <a:rPr lang="ko-KR" altLang="en-US" sz="1400">
+              <a:rPr lang="ko-KR" altLang="en-US" sz="1400" dirty="0">
                 <a:latin typeface="휴먼엑스포"/>
                 <a:ea typeface="휴먼엑스포"/>
               </a:rPr>
               <a:t>의 입력된 행과 열의 값이 </a:t>
             </a:r>
             <a:r>
-              <a:rPr lang="en-US" altLang="ko-KR" sz="1400">
+              <a:rPr lang="en-US" altLang="ko-KR" sz="1400" dirty="0">
                 <a:latin typeface="휴먼엑스포"/>
                 <a:ea typeface="휴먼엑스포"/>
               </a:rPr>
               <a:t>1~99</a:t>
             </a:r>
             <a:r>
-              <a:rPr lang="ko-KR" altLang="en-US" sz="1400">
+              <a:rPr lang="ko-KR" altLang="en-US" sz="1400" dirty="0">
                 <a:latin typeface="휴먼엑스포"/>
                 <a:ea typeface="휴먼엑스포"/>
               </a:rPr>
@@ -13695,14 +13685,14 @@
               <a:defRPr/>
             </a:pPr>
             <a:r>
-              <a:rPr lang="ko-KR" altLang="en-US" sz="1400">
+              <a:rPr lang="ko-KR" altLang="en-US" sz="1400" dirty="0">
                 <a:latin typeface="휴먼엑스포"/>
                 <a:ea typeface="휴먼엑스포"/>
               </a:rPr>
               <a:t>   랜덤으로 입력 됩니다</a:t>
             </a:r>
             <a:r>
-              <a:rPr lang="en-US" altLang="ko-KR" sz="1400">
+              <a:rPr lang="en-US" altLang="ko-KR" sz="1400" dirty="0">
                 <a:latin typeface="휴먼엑스포"/>
                 <a:ea typeface="휴먼엑스포"/>
               </a:rPr>
@@ -13714,28 +13704,28 @@
               <a:defRPr/>
             </a:pPr>
             <a:r>
-              <a:rPr lang="ko-KR" altLang="en-US" sz="1400">
+              <a:rPr lang="ko-KR" altLang="en-US" sz="1400" dirty="0">
                 <a:latin typeface="휴먼엑스포"/>
                 <a:ea typeface="휴먼엑스포"/>
               </a:rPr>
               <a:t>   직접입력</a:t>
             </a:r>
             <a:r>
-              <a:rPr lang="en-US" altLang="ko-KR" sz="1400">
+              <a:rPr lang="en-US" altLang="ko-KR" sz="1400" dirty="0">
                 <a:latin typeface="휴먼엑스포"/>
                 <a:ea typeface="휴먼엑스포"/>
               </a:rPr>
               <a:t>:</a:t>
             </a:r>
             <a:r>
-              <a:rPr lang="ko-KR" altLang="en-US" sz="1400">
+              <a:rPr lang="ko-KR" altLang="en-US" sz="1400" dirty="0">
                 <a:latin typeface="휴먼엑스포"/>
                 <a:ea typeface="휴먼엑스포"/>
               </a:rPr>
               <a:t> 입력된 행과 열의 값을 직접 입력합니다</a:t>
             </a:r>
             <a:r>
-              <a:rPr lang="en-US" altLang="ko-KR" sz="1400">
+              <a:rPr lang="en-US" altLang="ko-KR" sz="1400" dirty="0">
                 <a:latin typeface="휴먼엑스포"/>
                 <a:ea typeface="휴먼엑스포"/>
               </a:rPr>
@@ -13747,42 +13737,42 @@
               <a:defRPr/>
             </a:pPr>
             <a:r>
-              <a:rPr lang="ko-KR" altLang="en-US" sz="1400">
+              <a:rPr lang="ko-KR" altLang="en-US" sz="1400" dirty="0">
                 <a:latin typeface="휴먼엑스포"/>
                 <a:ea typeface="휴먼엑스포"/>
               </a:rPr>
               <a:t>   리셋</a:t>
             </a:r>
             <a:r>
-              <a:rPr lang="en-US" altLang="ko-KR" sz="1400">
+              <a:rPr lang="en-US" altLang="ko-KR" sz="1400" dirty="0">
                 <a:latin typeface="휴먼엑스포"/>
                 <a:ea typeface="휴먼엑스포"/>
               </a:rPr>
               <a:t>:</a:t>
             </a:r>
             <a:r>
-              <a:rPr lang="ko-KR" altLang="en-US" sz="1400">
+              <a:rPr lang="ko-KR" altLang="en-US" sz="1400" dirty="0">
                 <a:latin typeface="휴먼엑스포"/>
                 <a:ea typeface="휴먼엑스포"/>
               </a:rPr>
               <a:t> </a:t>
             </a:r>
             <a:r>
-              <a:rPr lang="en-US" altLang="ko-KR" sz="1400">
+              <a:rPr lang="en-US" altLang="ko-KR" sz="1400" dirty="0">
                 <a:latin typeface="휴먼엑스포"/>
                 <a:ea typeface="휴먼엑스포"/>
               </a:rPr>
               <a:t>1,2</a:t>
             </a:r>
             <a:r>
-              <a:rPr lang="ko-KR" altLang="en-US" sz="1400">
+              <a:rPr lang="ko-KR" altLang="en-US" sz="1400" dirty="0">
                 <a:latin typeface="휴먼엑스포"/>
                 <a:ea typeface="휴먼엑스포"/>
               </a:rPr>
               <a:t>의 행과 열의 값을 초기화합니다</a:t>
             </a:r>
             <a:r>
-              <a:rPr lang="en-US" altLang="ko-KR" sz="1400">
+              <a:rPr lang="en-US" altLang="ko-KR" sz="1400" dirty="0">
                 <a:latin typeface="휴먼엑스포"/>
                 <a:ea typeface="휴먼엑스포"/>
               </a:rPr>
@@ -13794,42 +13784,42 @@
               <a:defRPr/>
             </a:pPr>
             <a:r>
-              <a:rPr lang="ko-KR" altLang="en-US" sz="1400">
+              <a:rPr lang="ko-KR" altLang="en-US" sz="1400" dirty="0">
                 <a:latin typeface="휴먼엑스포"/>
                 <a:ea typeface="휴먼엑스포"/>
               </a:rPr>
               <a:t>   더하기</a:t>
             </a:r>
             <a:r>
-              <a:rPr lang="en-US" altLang="ko-KR" sz="1400">
+              <a:rPr lang="en-US" altLang="ko-KR" sz="1400" dirty="0">
                 <a:latin typeface="휴먼엑스포"/>
                 <a:ea typeface="휴먼엑스포"/>
               </a:rPr>
               <a:t>:</a:t>
             </a:r>
             <a:r>
-              <a:rPr lang="ko-KR" altLang="en-US" sz="1400">
+              <a:rPr lang="ko-KR" altLang="en-US" sz="1400" dirty="0">
                 <a:latin typeface="휴먼엑스포"/>
                 <a:ea typeface="휴먼엑스포"/>
               </a:rPr>
               <a:t> </a:t>
             </a:r>
             <a:r>
-              <a:rPr lang="en-US" altLang="ko-KR" sz="1400">
+              <a:rPr lang="en-US" altLang="ko-KR" sz="1400" dirty="0">
                 <a:latin typeface="휴먼엑스포"/>
                 <a:ea typeface="휴먼엑스포"/>
               </a:rPr>
               <a:t>1,2</a:t>
             </a:r>
             <a:r>
-              <a:rPr lang="ko-KR" altLang="en-US" sz="1400">
+              <a:rPr lang="ko-KR" altLang="en-US" sz="1400" dirty="0">
                 <a:latin typeface="휴먼엑스포"/>
                 <a:ea typeface="휴먼엑스포"/>
               </a:rPr>
               <a:t>의 행과 열의 값을 더합니다</a:t>
             </a:r>
             <a:r>
-              <a:rPr lang="en-US" altLang="ko-KR" sz="1400">
+              <a:rPr lang="en-US" altLang="ko-KR" sz="1400" dirty="0">
                 <a:latin typeface="휴먼엑스포"/>
                 <a:ea typeface="휴먼엑스포"/>
               </a:rPr>
@@ -13841,42 +13831,42 @@
               <a:defRPr/>
             </a:pPr>
             <a:r>
-              <a:rPr lang="ko-KR" altLang="en-US" sz="1400">
+              <a:rPr lang="ko-KR" altLang="en-US" sz="1400" dirty="0">
                 <a:latin typeface="휴먼엑스포"/>
                 <a:ea typeface="휴먼엑스포"/>
               </a:rPr>
               <a:t>   빼기</a:t>
             </a:r>
             <a:r>
-              <a:rPr lang="en-US" altLang="ko-KR" sz="1400">
+              <a:rPr lang="en-US" altLang="ko-KR" sz="1400" dirty="0">
                 <a:latin typeface="휴먼엑스포"/>
                 <a:ea typeface="휴먼엑스포"/>
               </a:rPr>
               <a:t>:</a:t>
             </a:r>
             <a:r>
-              <a:rPr lang="ko-KR" altLang="en-US" sz="1400">
+              <a:rPr lang="ko-KR" altLang="en-US" sz="1400" dirty="0">
                 <a:latin typeface="휴먼엑스포"/>
                 <a:ea typeface="휴먼엑스포"/>
               </a:rPr>
               <a:t> </a:t>
             </a:r>
             <a:r>
-              <a:rPr lang="en-US" altLang="ko-KR" sz="1400">
+              <a:rPr lang="en-US" altLang="ko-KR" sz="1400" dirty="0">
                 <a:latin typeface="휴먼엑스포"/>
                 <a:ea typeface="휴먼엑스포"/>
               </a:rPr>
               <a:t>1,2</a:t>
             </a:r>
             <a:r>
-              <a:rPr lang="ko-KR" altLang="en-US" sz="1400">
+              <a:rPr lang="ko-KR" altLang="en-US" sz="1400" dirty="0">
                 <a:latin typeface="휴먼엑스포"/>
                 <a:ea typeface="휴먼엑스포"/>
               </a:rPr>
               <a:t>의 행과 열의 값을 뺍니다</a:t>
             </a:r>
             <a:r>
-              <a:rPr lang="en-US" altLang="ko-KR" sz="1400">
+              <a:rPr lang="en-US" altLang="ko-KR" sz="1400" dirty="0">
                 <a:latin typeface="휴먼엑스포"/>
                 <a:ea typeface="휴먼엑스포"/>
               </a:rPr>
@@ -13888,42 +13878,42 @@
               <a:defRPr/>
             </a:pPr>
             <a:r>
-              <a:rPr lang="ko-KR" altLang="en-US" sz="1400">
+              <a:rPr lang="ko-KR" altLang="en-US" sz="1400" dirty="0">
                 <a:latin typeface="휴먼엑스포"/>
                 <a:ea typeface="휴먼엑스포"/>
               </a:rPr>
               <a:t>   곱하기</a:t>
             </a:r>
             <a:r>
-              <a:rPr lang="en-US" altLang="ko-KR" sz="1400">
+              <a:rPr lang="en-US" altLang="ko-KR" sz="1400" dirty="0">
                 <a:latin typeface="휴먼엑스포"/>
                 <a:ea typeface="휴먼엑스포"/>
               </a:rPr>
               <a:t>:</a:t>
             </a:r>
             <a:r>
-              <a:rPr lang="ko-KR" altLang="en-US" sz="1400">
+              <a:rPr lang="ko-KR" altLang="en-US" sz="1400" dirty="0">
                 <a:latin typeface="휴먼엑스포"/>
                 <a:ea typeface="휴먼엑스포"/>
               </a:rPr>
               <a:t> </a:t>
             </a:r>
             <a:r>
-              <a:rPr lang="en-US" altLang="ko-KR" sz="1400">
+              <a:rPr lang="en-US" altLang="ko-KR" sz="1400" dirty="0">
                 <a:latin typeface="휴먼엑스포"/>
                 <a:ea typeface="휴먼엑스포"/>
               </a:rPr>
               <a:t>1,2</a:t>
             </a:r>
             <a:r>
-              <a:rPr lang="ko-KR" altLang="en-US" sz="1400">
+              <a:rPr lang="ko-KR" altLang="en-US" sz="1400" dirty="0">
                 <a:latin typeface="휴먼엑스포"/>
                 <a:ea typeface="휴먼엑스포"/>
               </a:rPr>
               <a:t>의 행과 열의 값을 곱합니다</a:t>
             </a:r>
             <a:r>
-              <a:rPr lang="en-US" altLang="ko-KR" sz="1400">
+              <a:rPr lang="en-US" altLang="ko-KR" sz="1400" dirty="0">
                 <a:latin typeface="휴먼엑스포"/>
                 <a:ea typeface="휴먼엑스포"/>
               </a:rPr>
@@ -13934,7 +13924,7 @@
             <a:pPr>
               <a:defRPr/>
             </a:pPr>
-            <a:endParaRPr lang="ko-KR" altLang="en-US" sz="1600">
+            <a:endParaRPr lang="ko-KR" altLang="en-US" sz="1600" dirty="0">
               <a:latin typeface="휴먼엑스포"/>
               <a:ea typeface="휴먼엑스포"/>
             </a:endParaRPr>
@@ -13943,7 +13933,7 @@
             <a:pPr>
               <a:defRPr/>
             </a:pPr>
-            <a:endParaRPr lang="en-US" altLang="ko-KR" sz="1600">
+            <a:endParaRPr lang="en-US" altLang="ko-KR" sz="1600" dirty="0">
               <a:latin typeface="휴먼엑스포"/>
               <a:ea typeface="휴먼엑스포"/>
             </a:endParaRPr>
@@ -14034,7 +14024,7 @@
         </p:nvSpPr>
         <p:spPr>
           <a:xfrm>
-            <a:off x="1355408" y="4078368"/>
+            <a:off x="1121664" y="4078368"/>
             <a:ext cx="214779" cy="821765"/>
           </a:xfrm>
           <a:prstGeom prst="upArrow">
@@ -14087,7 +14077,7 @@
         </p:nvSpPr>
         <p:spPr>
           <a:xfrm>
-            <a:off x="5164796" y="4078368"/>
+            <a:off x="5325055" y="4067057"/>
             <a:ext cx="214779" cy="821765"/>
           </a:xfrm>
           <a:prstGeom prst="upArrow">
@@ -14140,7 +14130,7 @@
         </p:nvSpPr>
         <p:spPr>
           <a:xfrm>
-            <a:off x="9198667" y="4049793"/>
+            <a:off x="9413446" y="3929495"/>
             <a:ext cx="214779" cy="821765"/>
           </a:xfrm>
           <a:prstGeom prst="upArrow">
@@ -14225,7 +14215,7 @@
     <mc:Choice Requires="p14">
       <p:transition/>
     </mc:Choice>
-    <mc:Fallback xmlns:dsp="http://schemas.microsoft.com/office/drawing/2008/diagram" xmlns:dgm="http://schemas.openxmlformats.org/drawingml/2006/diagram" xmlns:c="http://schemas.openxmlformats.org/drawingml/2006/chart" xmlns="">
+    <mc:Fallback xmlns="" xmlns:c="http://schemas.openxmlformats.org/drawingml/2006/chart" xmlns:dgm="http://schemas.openxmlformats.org/drawingml/2006/diagram" xmlns:dsp="http://schemas.microsoft.com/office/drawing/2008/diagram">
       <p:transition/>
     </mc:Fallback>
   </mc:AlternateContent>
@@ -14251,37 +14241,32 @@
       </p:grpSpPr>
       <p:pic>
         <p:nvPicPr>
-          <p:cNvPr id="5" name="내용 개체 틀 4">
+          <p:cNvPr id="6" name="그림 5">
             <a:extLst>
               <a:ext uri="{FF2B5EF4-FFF2-40B4-BE49-F238E27FC236}">
-                <a16:creationId xmlns:a16="http://schemas.microsoft.com/office/drawing/2014/main" id="{177294BC-F707-4811-B92D-B0A8F787041B}"/>
+                <a16:creationId xmlns:a16="http://schemas.microsoft.com/office/drawing/2014/main" id="{E3D60BBC-55BC-4BA6-A517-E09BB1956F58}"/>
               </a:ext>
             </a:extLst>
           </p:cNvPr>
           <p:cNvPicPr>
-            <a:picLocks noGrp="1" noChangeAspect="1"/>
+            <a:picLocks noChangeAspect="1"/>
           </p:cNvPicPr>
-          <p:nvPr>
-            <p:ph idx="1"/>
-          </p:nvPr>
+          <p:nvPr/>
         </p:nvPicPr>
         <p:blipFill>
-          <a:blip r:embed="rId2">
-            <a:extLst>
-              <a:ext uri="{28A0092B-C50C-407E-A947-70E740481C1C}">
-                <a14:useLocalDpi xmlns:a14="http://schemas.microsoft.com/office/drawing/2010/main" val="0"/>
-              </a:ext>
-            </a:extLst>
-          </a:blip>
+          <a:blip r:embed="rId2"/>
           <a:stretch>
             <a:fillRect/>
           </a:stretch>
         </p:blipFill>
         <p:spPr>
           <a:xfrm>
-            <a:off x="285750" y="2011692"/>
-            <a:ext cx="11303000" cy="3340035"/>
-          </a:xfrm>
+            <a:off x="116889" y="1823936"/>
+            <a:ext cx="11772427" cy="3613654"/>
+          </a:xfrm>
+          <a:prstGeom prst="rect">
+            <a:avLst/>
+          </a:prstGeom>
         </p:spPr>
       </p:pic>
       <p:sp>
@@ -14779,7 +14764,7 @@
     <mc:Choice Requires="p14">
       <p:transition/>
     </mc:Choice>
-    <mc:Fallback xmlns:dsp="http://schemas.microsoft.com/office/drawing/2008/diagram" xmlns:dgm="http://schemas.openxmlformats.org/drawingml/2006/diagram" xmlns:c="http://schemas.openxmlformats.org/drawingml/2006/chart" xmlns="">
+    <mc:Fallback xmlns="" xmlns:c="http://schemas.openxmlformats.org/drawingml/2006/chart" xmlns:dgm="http://schemas.openxmlformats.org/drawingml/2006/diagram" xmlns:dsp="http://schemas.microsoft.com/office/drawing/2008/diagram">
       <p:transition/>
     </mc:Fallback>
   </mc:AlternateContent>
@@ -15340,7 +15325,7 @@
     <mc:Choice Requires="p14">
       <p:transition/>
     </mc:Choice>
-    <mc:Fallback xmlns:dsp="http://schemas.microsoft.com/office/drawing/2008/diagram" xmlns:dgm="http://schemas.openxmlformats.org/drawingml/2006/diagram" xmlns:c="http://schemas.openxmlformats.org/drawingml/2006/chart" xmlns="">
+    <mc:Fallback xmlns="" xmlns:c="http://schemas.openxmlformats.org/drawingml/2006/chart" xmlns:dgm="http://schemas.openxmlformats.org/drawingml/2006/diagram" xmlns:dsp="http://schemas.microsoft.com/office/drawing/2008/diagram">
       <p:transition/>
     </mc:Fallback>
   </mc:AlternateContent>
@@ -15844,7 +15829,7 @@
     <mc:Choice Requires="p14">
       <p:transition/>
     </mc:Choice>
-    <mc:Fallback xmlns:dsp="http://schemas.microsoft.com/office/drawing/2008/diagram" xmlns:dgm="http://schemas.openxmlformats.org/drawingml/2006/diagram" xmlns:c="http://schemas.openxmlformats.org/drawingml/2006/chart" xmlns="">
+    <mc:Fallback xmlns="" xmlns:c="http://schemas.openxmlformats.org/drawingml/2006/chart" xmlns:dgm="http://schemas.openxmlformats.org/drawingml/2006/diagram" xmlns:dsp="http://schemas.microsoft.com/office/drawing/2008/diagram">
       <p:transition/>
     </mc:Fallback>
   </mc:AlternateContent>
@@ -16174,7 +16159,7 @@
     <mc:Choice Requires="p14">
       <p:transition/>
     </mc:Choice>
-    <mc:Fallback xmlns:dsp="http://schemas.microsoft.com/office/drawing/2008/diagram" xmlns:dgm="http://schemas.openxmlformats.org/drawingml/2006/diagram" xmlns:c="http://schemas.openxmlformats.org/drawingml/2006/chart" xmlns="">
+    <mc:Fallback xmlns="" xmlns:c="http://schemas.openxmlformats.org/drawingml/2006/chart" xmlns:dgm="http://schemas.openxmlformats.org/drawingml/2006/diagram" xmlns:dsp="http://schemas.microsoft.com/office/drawing/2008/diagram">
       <p:transition/>
     </mc:Fallback>
   </mc:AlternateContent>
